--- a/public/videos/repositories/prize-arrival-watch/prize-arrival-watch-tech-preview.pptx
+++ b/public/videos/repositories/prize-arrival-watch/prize-arrival-watch-tech-preview.pptx
@@ -134,7 +134,7 @@
           <p:cNvPr id="2" name="タイトル 1">
             <a:extLst>
               <a:ext uri="{FF2B5EF4-FFF2-40B4-BE49-F238E27FC236}">
-                <a16:creationId xmlns:a16="http://schemas.microsoft.com/office/drawing/2014/main" id="{0B87950E-9D95-C987-F905-E7F35AA4E85A}"/>
+                <a16:creationId xmlns:a16="http://schemas.microsoft.com/office/drawing/2014/main" id="{248A6F0C-7154-43D9-4908-9E5967B6B06A}"/>
               </a:ext>
             </a:extLst>
           </p:cNvPr>
@@ -171,7 +171,7 @@
           <p:cNvPr id="3" name="字幕 2">
             <a:extLst>
               <a:ext uri="{FF2B5EF4-FFF2-40B4-BE49-F238E27FC236}">
-                <a16:creationId xmlns:a16="http://schemas.microsoft.com/office/drawing/2014/main" id="{B39F240A-F0B0-689F-A7E2-938418FF9244}"/>
+                <a16:creationId xmlns:a16="http://schemas.microsoft.com/office/drawing/2014/main" id="{15451601-B4FB-004E-C0A5-9B556D87DCF0}"/>
               </a:ext>
             </a:extLst>
           </p:cNvPr>
@@ -241,7 +241,7 @@
           <p:cNvPr id="4" name="日付プレースホルダー 3">
             <a:extLst>
               <a:ext uri="{FF2B5EF4-FFF2-40B4-BE49-F238E27FC236}">
-                <a16:creationId xmlns:a16="http://schemas.microsoft.com/office/drawing/2014/main" id="{87D456A2-DCBD-8D6F-B394-09753DAC9A79}"/>
+                <a16:creationId xmlns:a16="http://schemas.microsoft.com/office/drawing/2014/main" id="{CFD6A406-46F9-B466-E656-D9CFE52610EF}"/>
               </a:ext>
             </a:extLst>
           </p:cNvPr>
@@ -257,7 +257,7 @@
           <a:bodyPr/>
           <a:lstStyle/>
           <a:p>
-            <a:fld id="{0D8922B8-D78D-4F2F-BBEC-BBA9B4FE2134}" type="datetimeFigureOut">
+            <a:fld id="{FE68CC9A-C38D-4B8D-9576-3E25274D76C0}" type="datetimeFigureOut">
               <a:rPr kumimoji="1" lang="ja-JP" altLang="en-US" smtClean="0"/>
               <a:t>2026/7/30</a:t>
             </a:fld>
@@ -270,7 +270,7 @@
           <p:cNvPr id="5" name="フッター プレースホルダー 4">
             <a:extLst>
               <a:ext uri="{FF2B5EF4-FFF2-40B4-BE49-F238E27FC236}">
-                <a16:creationId xmlns:a16="http://schemas.microsoft.com/office/drawing/2014/main" id="{DAF436CB-8C70-860A-4BFF-457248C3A4FB}"/>
+                <a16:creationId xmlns:a16="http://schemas.microsoft.com/office/drawing/2014/main" id="{984222D0-BBE9-3D26-A4CC-F871A2081DAB}"/>
               </a:ext>
             </a:extLst>
           </p:cNvPr>
@@ -295,7 +295,7 @@
           <p:cNvPr id="6" name="スライド番号プレースホルダー 5">
             <a:extLst>
               <a:ext uri="{FF2B5EF4-FFF2-40B4-BE49-F238E27FC236}">
-                <a16:creationId xmlns:a16="http://schemas.microsoft.com/office/drawing/2014/main" id="{42E85BC7-F393-38F5-61FE-425B401A1BA0}"/>
+                <a16:creationId xmlns:a16="http://schemas.microsoft.com/office/drawing/2014/main" id="{5703D856-872B-EBBB-7A17-6C15FFB4242A}"/>
               </a:ext>
             </a:extLst>
           </p:cNvPr>
@@ -311,7 +311,7 @@
           <a:bodyPr/>
           <a:lstStyle/>
           <a:p>
-            <a:fld id="{DFFD2848-80BF-456E-A33A-332F56BCF303}" type="slidenum">
+            <a:fld id="{C19469CC-0BB0-45C6-A481-B64D40FCAEEE}" type="slidenum">
               <a:rPr kumimoji="1" lang="ja-JP" altLang="en-US" smtClean="0"/>
               <a:t>‹#›</a:t>
             </a:fld>
@@ -322,7 +322,7 @@
     </p:spTree>
     <p:extLst>
       <p:ext uri="{BB962C8B-B14F-4D97-AF65-F5344CB8AC3E}">
-        <p14:creationId xmlns:p14="http://schemas.microsoft.com/office/powerpoint/2010/main" val="1084028748"/>
+        <p14:creationId xmlns:p14="http://schemas.microsoft.com/office/powerpoint/2010/main" val="606166221"/>
       </p:ext>
     </p:extLst>
   </p:cSld>
@@ -354,7 +354,7 @@
           <p:cNvPr id="2" name="タイトル 1">
             <a:extLst>
               <a:ext uri="{FF2B5EF4-FFF2-40B4-BE49-F238E27FC236}">
-                <a16:creationId xmlns:a16="http://schemas.microsoft.com/office/drawing/2014/main" id="{46D66F29-42EC-F850-C9F0-BCD6B7258F3F}"/>
+                <a16:creationId xmlns:a16="http://schemas.microsoft.com/office/drawing/2014/main" id="{855A3B39-6AB0-2C3A-3DA2-6EF8D70673BD}"/>
               </a:ext>
             </a:extLst>
           </p:cNvPr>
@@ -382,7 +382,7 @@
           <p:cNvPr id="3" name="縦書きテキスト プレースホルダー 2">
             <a:extLst>
               <a:ext uri="{FF2B5EF4-FFF2-40B4-BE49-F238E27FC236}">
-                <a16:creationId xmlns:a16="http://schemas.microsoft.com/office/drawing/2014/main" id="{9441764D-01A8-0F81-72C4-AC1949FF4B14}"/>
+                <a16:creationId xmlns:a16="http://schemas.microsoft.com/office/drawing/2014/main" id="{B4A2E5EF-C83B-9DC5-BC5B-5B0A99FB5F1A}"/>
               </a:ext>
             </a:extLst>
           </p:cNvPr>
@@ -471,7 +471,7 @@
           <p:cNvPr id="4" name="日付プレースホルダー 3">
             <a:extLst>
               <a:ext uri="{FF2B5EF4-FFF2-40B4-BE49-F238E27FC236}">
-                <a16:creationId xmlns:a16="http://schemas.microsoft.com/office/drawing/2014/main" id="{20F83A7B-5AB5-5DD5-0168-FA104E34B4AD}"/>
+                <a16:creationId xmlns:a16="http://schemas.microsoft.com/office/drawing/2014/main" id="{8EEC7FD7-F01C-D921-010D-6ED7C7B04A33}"/>
               </a:ext>
             </a:extLst>
           </p:cNvPr>
@@ -487,7 +487,7 @@
           <a:bodyPr/>
           <a:lstStyle/>
           <a:p>
-            <a:fld id="{0D8922B8-D78D-4F2F-BBEC-BBA9B4FE2134}" type="datetimeFigureOut">
+            <a:fld id="{FE68CC9A-C38D-4B8D-9576-3E25274D76C0}" type="datetimeFigureOut">
               <a:rPr kumimoji="1" lang="ja-JP" altLang="en-US" smtClean="0"/>
               <a:t>2026/7/30</a:t>
             </a:fld>
@@ -500,7 +500,7 @@
           <p:cNvPr id="5" name="フッター プレースホルダー 4">
             <a:extLst>
               <a:ext uri="{FF2B5EF4-FFF2-40B4-BE49-F238E27FC236}">
-                <a16:creationId xmlns:a16="http://schemas.microsoft.com/office/drawing/2014/main" id="{ABDBEA41-0EA2-30A2-23E1-5AFC0F7F5B1C}"/>
+                <a16:creationId xmlns:a16="http://schemas.microsoft.com/office/drawing/2014/main" id="{F4E69FFC-EA12-2251-4CE4-67B796DAA306}"/>
               </a:ext>
             </a:extLst>
           </p:cNvPr>
@@ -525,7 +525,7 @@
           <p:cNvPr id="6" name="スライド番号プレースホルダー 5">
             <a:extLst>
               <a:ext uri="{FF2B5EF4-FFF2-40B4-BE49-F238E27FC236}">
-                <a16:creationId xmlns:a16="http://schemas.microsoft.com/office/drawing/2014/main" id="{AD251E51-EDA2-2DBF-FE7A-ABA11D2078EB}"/>
+                <a16:creationId xmlns:a16="http://schemas.microsoft.com/office/drawing/2014/main" id="{28BB9D37-3BDE-EE08-A3CD-E63A7C0620BC}"/>
               </a:ext>
             </a:extLst>
           </p:cNvPr>
@@ -541,7 +541,7 @@
           <a:bodyPr/>
           <a:lstStyle/>
           <a:p>
-            <a:fld id="{DFFD2848-80BF-456E-A33A-332F56BCF303}" type="slidenum">
+            <a:fld id="{C19469CC-0BB0-45C6-A481-B64D40FCAEEE}" type="slidenum">
               <a:rPr kumimoji="1" lang="ja-JP" altLang="en-US" smtClean="0"/>
               <a:t>‹#›</a:t>
             </a:fld>
@@ -552,7 +552,7 @@
     </p:spTree>
     <p:extLst>
       <p:ext uri="{BB962C8B-B14F-4D97-AF65-F5344CB8AC3E}">
-        <p14:creationId xmlns:p14="http://schemas.microsoft.com/office/powerpoint/2010/main" val="1188304123"/>
+        <p14:creationId xmlns:p14="http://schemas.microsoft.com/office/powerpoint/2010/main" val="4084486104"/>
       </p:ext>
     </p:extLst>
   </p:cSld>
@@ -584,7 +584,7 @@
           <p:cNvPr id="2" name="縦書きタイトル 1">
             <a:extLst>
               <a:ext uri="{FF2B5EF4-FFF2-40B4-BE49-F238E27FC236}">
-                <a16:creationId xmlns:a16="http://schemas.microsoft.com/office/drawing/2014/main" id="{9849F66A-003C-E329-E389-F13743F740B2}"/>
+                <a16:creationId xmlns:a16="http://schemas.microsoft.com/office/drawing/2014/main" id="{B0362FEE-F0A9-B7DD-89D6-438275F39AE6}"/>
               </a:ext>
             </a:extLst>
           </p:cNvPr>
@@ -617,7 +617,7 @@
           <p:cNvPr id="3" name="縦書きテキスト プレースホルダー 2">
             <a:extLst>
               <a:ext uri="{FF2B5EF4-FFF2-40B4-BE49-F238E27FC236}">
-                <a16:creationId xmlns:a16="http://schemas.microsoft.com/office/drawing/2014/main" id="{012ABD10-51BE-C04F-DF15-F8CA5ADD6AC0}"/>
+                <a16:creationId xmlns:a16="http://schemas.microsoft.com/office/drawing/2014/main" id="{56015E81-9762-C411-73E3-310B926012F6}"/>
               </a:ext>
             </a:extLst>
           </p:cNvPr>
@@ -711,7 +711,7 @@
           <p:cNvPr id="4" name="日付プレースホルダー 3">
             <a:extLst>
               <a:ext uri="{FF2B5EF4-FFF2-40B4-BE49-F238E27FC236}">
-                <a16:creationId xmlns:a16="http://schemas.microsoft.com/office/drawing/2014/main" id="{3875EE40-E9BA-3488-8F14-55FDEB2EA294}"/>
+                <a16:creationId xmlns:a16="http://schemas.microsoft.com/office/drawing/2014/main" id="{2345FD74-21DC-3697-1FE4-6788D1CB57A8}"/>
               </a:ext>
             </a:extLst>
           </p:cNvPr>
@@ -727,7 +727,7 @@
           <a:bodyPr/>
           <a:lstStyle/>
           <a:p>
-            <a:fld id="{0D8922B8-D78D-4F2F-BBEC-BBA9B4FE2134}" type="datetimeFigureOut">
+            <a:fld id="{FE68CC9A-C38D-4B8D-9576-3E25274D76C0}" type="datetimeFigureOut">
               <a:rPr kumimoji="1" lang="ja-JP" altLang="en-US" smtClean="0"/>
               <a:t>2026/7/30</a:t>
             </a:fld>
@@ -740,7 +740,7 @@
           <p:cNvPr id="5" name="フッター プレースホルダー 4">
             <a:extLst>
               <a:ext uri="{FF2B5EF4-FFF2-40B4-BE49-F238E27FC236}">
-                <a16:creationId xmlns:a16="http://schemas.microsoft.com/office/drawing/2014/main" id="{DFCC02D0-4E8F-8BBA-582F-7F6E41FCDC94}"/>
+                <a16:creationId xmlns:a16="http://schemas.microsoft.com/office/drawing/2014/main" id="{8049D08E-FD6A-7E4E-323B-9F3B6D81A926}"/>
               </a:ext>
             </a:extLst>
           </p:cNvPr>
@@ -765,7 +765,7 @@
           <p:cNvPr id="6" name="スライド番号プレースホルダー 5">
             <a:extLst>
               <a:ext uri="{FF2B5EF4-FFF2-40B4-BE49-F238E27FC236}">
-                <a16:creationId xmlns:a16="http://schemas.microsoft.com/office/drawing/2014/main" id="{A40AAB21-6B63-37D2-6B66-7ECF1202389A}"/>
+                <a16:creationId xmlns:a16="http://schemas.microsoft.com/office/drawing/2014/main" id="{2E40B9D0-6373-8A39-064E-248375022794}"/>
               </a:ext>
             </a:extLst>
           </p:cNvPr>
@@ -781,7 +781,7 @@
           <a:bodyPr/>
           <a:lstStyle/>
           <a:p>
-            <a:fld id="{DFFD2848-80BF-456E-A33A-332F56BCF303}" type="slidenum">
+            <a:fld id="{C19469CC-0BB0-45C6-A481-B64D40FCAEEE}" type="slidenum">
               <a:rPr kumimoji="1" lang="ja-JP" altLang="en-US" smtClean="0"/>
               <a:t>‹#›</a:t>
             </a:fld>
@@ -792,7 +792,7 @@
     </p:spTree>
     <p:extLst>
       <p:ext uri="{BB962C8B-B14F-4D97-AF65-F5344CB8AC3E}">
-        <p14:creationId xmlns:p14="http://schemas.microsoft.com/office/powerpoint/2010/main" val="4079815811"/>
+        <p14:creationId xmlns:p14="http://schemas.microsoft.com/office/powerpoint/2010/main" val="240248046"/>
       </p:ext>
     </p:extLst>
   </p:cSld>
@@ -824,7 +824,7 @@
           <p:cNvPr id="2" name="タイトル 1">
             <a:extLst>
               <a:ext uri="{FF2B5EF4-FFF2-40B4-BE49-F238E27FC236}">
-                <a16:creationId xmlns:a16="http://schemas.microsoft.com/office/drawing/2014/main" id="{1B1B7AA7-2304-B41F-B15F-CCE51AF5DA22}"/>
+                <a16:creationId xmlns:a16="http://schemas.microsoft.com/office/drawing/2014/main" id="{AA15E56F-1D52-B619-B526-5D031EB11257}"/>
               </a:ext>
             </a:extLst>
           </p:cNvPr>
@@ -852,7 +852,7 @@
           <p:cNvPr id="3" name="コンテンツ プレースホルダー 2">
             <a:extLst>
               <a:ext uri="{FF2B5EF4-FFF2-40B4-BE49-F238E27FC236}">
-                <a16:creationId xmlns:a16="http://schemas.microsoft.com/office/drawing/2014/main" id="{DB2E1393-F433-E290-94EA-26DB52070295}"/>
+                <a16:creationId xmlns:a16="http://schemas.microsoft.com/office/drawing/2014/main" id="{124A4087-15EA-D2FB-4EFA-C15F22BB0FD1}"/>
               </a:ext>
             </a:extLst>
           </p:cNvPr>
@@ -941,7 +941,7 @@
           <p:cNvPr id="4" name="日付プレースホルダー 3">
             <a:extLst>
               <a:ext uri="{FF2B5EF4-FFF2-40B4-BE49-F238E27FC236}">
-                <a16:creationId xmlns:a16="http://schemas.microsoft.com/office/drawing/2014/main" id="{1F1F9DE5-2ED1-89EC-E36B-338C3FCDFFE1}"/>
+                <a16:creationId xmlns:a16="http://schemas.microsoft.com/office/drawing/2014/main" id="{2C37C559-32BA-0181-9E92-A469772ED9AA}"/>
               </a:ext>
             </a:extLst>
           </p:cNvPr>
@@ -957,7 +957,7 @@
           <a:bodyPr/>
           <a:lstStyle/>
           <a:p>
-            <a:fld id="{0D8922B8-D78D-4F2F-BBEC-BBA9B4FE2134}" type="datetimeFigureOut">
+            <a:fld id="{FE68CC9A-C38D-4B8D-9576-3E25274D76C0}" type="datetimeFigureOut">
               <a:rPr kumimoji="1" lang="ja-JP" altLang="en-US" smtClean="0"/>
               <a:t>2026/7/30</a:t>
             </a:fld>
@@ -970,7 +970,7 @@
           <p:cNvPr id="5" name="フッター プレースホルダー 4">
             <a:extLst>
               <a:ext uri="{FF2B5EF4-FFF2-40B4-BE49-F238E27FC236}">
-                <a16:creationId xmlns:a16="http://schemas.microsoft.com/office/drawing/2014/main" id="{DC5D6066-B82C-7756-6AE2-663CD302AEA4}"/>
+                <a16:creationId xmlns:a16="http://schemas.microsoft.com/office/drawing/2014/main" id="{96108261-E97D-06B5-701E-A8BD9D80D9D6}"/>
               </a:ext>
             </a:extLst>
           </p:cNvPr>
@@ -995,7 +995,7 @@
           <p:cNvPr id="6" name="スライド番号プレースホルダー 5">
             <a:extLst>
               <a:ext uri="{FF2B5EF4-FFF2-40B4-BE49-F238E27FC236}">
-                <a16:creationId xmlns:a16="http://schemas.microsoft.com/office/drawing/2014/main" id="{9094A161-003C-4A12-F412-AD85E4506CC9}"/>
+                <a16:creationId xmlns:a16="http://schemas.microsoft.com/office/drawing/2014/main" id="{66505AB0-A53E-F005-3E00-C9186F656050}"/>
               </a:ext>
             </a:extLst>
           </p:cNvPr>
@@ -1011,7 +1011,7 @@
           <a:bodyPr/>
           <a:lstStyle/>
           <a:p>
-            <a:fld id="{DFFD2848-80BF-456E-A33A-332F56BCF303}" type="slidenum">
+            <a:fld id="{C19469CC-0BB0-45C6-A481-B64D40FCAEEE}" type="slidenum">
               <a:rPr kumimoji="1" lang="ja-JP" altLang="en-US" smtClean="0"/>
               <a:t>‹#›</a:t>
             </a:fld>
@@ -1022,7 +1022,7 @@
     </p:spTree>
     <p:extLst>
       <p:ext uri="{BB962C8B-B14F-4D97-AF65-F5344CB8AC3E}">
-        <p14:creationId xmlns:p14="http://schemas.microsoft.com/office/powerpoint/2010/main" val="3882440428"/>
+        <p14:creationId xmlns:p14="http://schemas.microsoft.com/office/powerpoint/2010/main" val="1035133978"/>
       </p:ext>
     </p:extLst>
   </p:cSld>
@@ -1054,7 +1054,7 @@
           <p:cNvPr id="2" name="タイトル 1">
             <a:extLst>
               <a:ext uri="{FF2B5EF4-FFF2-40B4-BE49-F238E27FC236}">
-                <a16:creationId xmlns:a16="http://schemas.microsoft.com/office/drawing/2014/main" id="{E64F3467-0672-E144-4B46-DF539E3C66E3}"/>
+                <a16:creationId xmlns:a16="http://schemas.microsoft.com/office/drawing/2014/main" id="{84BAE3BE-F4F7-1792-B10D-63E1079D030D}"/>
               </a:ext>
             </a:extLst>
           </p:cNvPr>
@@ -1091,7 +1091,7 @@
           <p:cNvPr id="3" name="テキスト プレースホルダー 2">
             <a:extLst>
               <a:ext uri="{FF2B5EF4-FFF2-40B4-BE49-F238E27FC236}">
-                <a16:creationId xmlns:a16="http://schemas.microsoft.com/office/drawing/2014/main" id="{B011D72B-50F1-B027-974C-42A84BDA64FB}"/>
+                <a16:creationId xmlns:a16="http://schemas.microsoft.com/office/drawing/2014/main" id="{E8D8705E-A414-FE2A-302A-17B8314026FB}"/>
               </a:ext>
             </a:extLst>
           </p:cNvPr>
@@ -1216,7 +1216,7 @@
           <p:cNvPr id="4" name="日付プレースホルダー 3">
             <a:extLst>
               <a:ext uri="{FF2B5EF4-FFF2-40B4-BE49-F238E27FC236}">
-                <a16:creationId xmlns:a16="http://schemas.microsoft.com/office/drawing/2014/main" id="{3F039501-0C94-85F2-EBC5-91809FABFF24}"/>
+                <a16:creationId xmlns:a16="http://schemas.microsoft.com/office/drawing/2014/main" id="{FCDAD8A7-7937-8CB5-E00E-A4A034B4B9AF}"/>
               </a:ext>
             </a:extLst>
           </p:cNvPr>
@@ -1232,7 +1232,7 @@
           <a:bodyPr/>
           <a:lstStyle/>
           <a:p>
-            <a:fld id="{0D8922B8-D78D-4F2F-BBEC-BBA9B4FE2134}" type="datetimeFigureOut">
+            <a:fld id="{FE68CC9A-C38D-4B8D-9576-3E25274D76C0}" type="datetimeFigureOut">
               <a:rPr kumimoji="1" lang="ja-JP" altLang="en-US" smtClean="0"/>
               <a:t>2026/7/30</a:t>
             </a:fld>
@@ -1245,7 +1245,7 @@
           <p:cNvPr id="5" name="フッター プレースホルダー 4">
             <a:extLst>
               <a:ext uri="{FF2B5EF4-FFF2-40B4-BE49-F238E27FC236}">
-                <a16:creationId xmlns:a16="http://schemas.microsoft.com/office/drawing/2014/main" id="{2D4D8699-C76C-6BAD-AB06-E7E42D18A43C}"/>
+                <a16:creationId xmlns:a16="http://schemas.microsoft.com/office/drawing/2014/main" id="{6C25B5BA-BCF9-DBB4-EFE3-E2B42B097EA1}"/>
               </a:ext>
             </a:extLst>
           </p:cNvPr>
@@ -1270,7 +1270,7 @@
           <p:cNvPr id="6" name="スライド番号プレースホルダー 5">
             <a:extLst>
               <a:ext uri="{FF2B5EF4-FFF2-40B4-BE49-F238E27FC236}">
-                <a16:creationId xmlns:a16="http://schemas.microsoft.com/office/drawing/2014/main" id="{32123F79-0C7B-19E3-CC9E-9B8739A63D07}"/>
+                <a16:creationId xmlns:a16="http://schemas.microsoft.com/office/drawing/2014/main" id="{30CEB2AB-ED82-E6AC-886E-75695FC5923B}"/>
               </a:ext>
             </a:extLst>
           </p:cNvPr>
@@ -1286,7 +1286,7 @@
           <a:bodyPr/>
           <a:lstStyle/>
           <a:p>
-            <a:fld id="{DFFD2848-80BF-456E-A33A-332F56BCF303}" type="slidenum">
+            <a:fld id="{C19469CC-0BB0-45C6-A481-B64D40FCAEEE}" type="slidenum">
               <a:rPr kumimoji="1" lang="ja-JP" altLang="en-US" smtClean="0"/>
               <a:t>‹#›</a:t>
             </a:fld>
@@ -1297,7 +1297,7 @@
     </p:spTree>
     <p:extLst>
       <p:ext uri="{BB962C8B-B14F-4D97-AF65-F5344CB8AC3E}">
-        <p14:creationId xmlns:p14="http://schemas.microsoft.com/office/powerpoint/2010/main" val="479302005"/>
+        <p14:creationId xmlns:p14="http://schemas.microsoft.com/office/powerpoint/2010/main" val="954048377"/>
       </p:ext>
     </p:extLst>
   </p:cSld>
@@ -1329,7 +1329,7 @@
           <p:cNvPr id="2" name="タイトル 1">
             <a:extLst>
               <a:ext uri="{FF2B5EF4-FFF2-40B4-BE49-F238E27FC236}">
-                <a16:creationId xmlns:a16="http://schemas.microsoft.com/office/drawing/2014/main" id="{D84210BE-8A1E-F256-64FF-FA2DEF086D1A}"/>
+                <a16:creationId xmlns:a16="http://schemas.microsoft.com/office/drawing/2014/main" id="{D778EBD8-14AD-2C88-31DB-321A4B32A800}"/>
               </a:ext>
             </a:extLst>
           </p:cNvPr>
@@ -1357,7 +1357,7 @@
           <p:cNvPr id="3" name="コンテンツ プレースホルダー 2">
             <a:extLst>
               <a:ext uri="{FF2B5EF4-FFF2-40B4-BE49-F238E27FC236}">
-                <a16:creationId xmlns:a16="http://schemas.microsoft.com/office/drawing/2014/main" id="{3D6440BF-E0A8-31CD-C8C5-12938A6EFCA1}"/>
+                <a16:creationId xmlns:a16="http://schemas.microsoft.com/office/drawing/2014/main" id="{1EAE929E-B2EF-2146-9E5F-4B15CEDE5269}"/>
               </a:ext>
             </a:extLst>
           </p:cNvPr>
@@ -1451,7 +1451,7 @@
           <p:cNvPr id="4" name="コンテンツ プレースホルダー 3">
             <a:extLst>
               <a:ext uri="{FF2B5EF4-FFF2-40B4-BE49-F238E27FC236}">
-                <a16:creationId xmlns:a16="http://schemas.microsoft.com/office/drawing/2014/main" id="{F000BD60-9172-DC19-0302-0B36EE82AF58}"/>
+                <a16:creationId xmlns:a16="http://schemas.microsoft.com/office/drawing/2014/main" id="{800D62EC-0D03-4C77-EF1C-B876F4759CF4}"/>
               </a:ext>
             </a:extLst>
           </p:cNvPr>
@@ -1545,7 +1545,7 @@
           <p:cNvPr id="5" name="日付プレースホルダー 4">
             <a:extLst>
               <a:ext uri="{FF2B5EF4-FFF2-40B4-BE49-F238E27FC236}">
-                <a16:creationId xmlns:a16="http://schemas.microsoft.com/office/drawing/2014/main" id="{3C2AD313-9034-E5A8-5AB8-AD85207C2487}"/>
+                <a16:creationId xmlns:a16="http://schemas.microsoft.com/office/drawing/2014/main" id="{D3E3A1D7-A3C0-C053-0EED-8D8E3D43DB7B}"/>
               </a:ext>
             </a:extLst>
           </p:cNvPr>
@@ -1561,7 +1561,7 @@
           <a:bodyPr/>
           <a:lstStyle/>
           <a:p>
-            <a:fld id="{0D8922B8-D78D-4F2F-BBEC-BBA9B4FE2134}" type="datetimeFigureOut">
+            <a:fld id="{FE68CC9A-C38D-4B8D-9576-3E25274D76C0}" type="datetimeFigureOut">
               <a:rPr kumimoji="1" lang="ja-JP" altLang="en-US" smtClean="0"/>
               <a:t>2026/7/30</a:t>
             </a:fld>
@@ -1574,7 +1574,7 @@
           <p:cNvPr id="6" name="フッター プレースホルダー 5">
             <a:extLst>
               <a:ext uri="{FF2B5EF4-FFF2-40B4-BE49-F238E27FC236}">
-                <a16:creationId xmlns:a16="http://schemas.microsoft.com/office/drawing/2014/main" id="{DE6FA7F1-366D-82AC-6C23-CE081D850ED1}"/>
+                <a16:creationId xmlns:a16="http://schemas.microsoft.com/office/drawing/2014/main" id="{6CBEA385-570B-D04C-6636-008255C113A2}"/>
               </a:ext>
             </a:extLst>
           </p:cNvPr>
@@ -1599,7 +1599,7 @@
           <p:cNvPr id="7" name="スライド番号プレースホルダー 6">
             <a:extLst>
               <a:ext uri="{FF2B5EF4-FFF2-40B4-BE49-F238E27FC236}">
-                <a16:creationId xmlns:a16="http://schemas.microsoft.com/office/drawing/2014/main" id="{634F7754-D52A-E131-B7CB-66F9B6C58D14}"/>
+                <a16:creationId xmlns:a16="http://schemas.microsoft.com/office/drawing/2014/main" id="{F165DF60-E096-5C5E-92DA-4E080BD45C51}"/>
               </a:ext>
             </a:extLst>
           </p:cNvPr>
@@ -1615,7 +1615,7 @@
           <a:bodyPr/>
           <a:lstStyle/>
           <a:p>
-            <a:fld id="{DFFD2848-80BF-456E-A33A-332F56BCF303}" type="slidenum">
+            <a:fld id="{C19469CC-0BB0-45C6-A481-B64D40FCAEEE}" type="slidenum">
               <a:rPr kumimoji="1" lang="ja-JP" altLang="en-US" smtClean="0"/>
               <a:t>‹#›</a:t>
             </a:fld>
@@ -1626,7 +1626,7 @@
     </p:spTree>
     <p:extLst>
       <p:ext uri="{BB962C8B-B14F-4D97-AF65-F5344CB8AC3E}">
-        <p14:creationId xmlns:p14="http://schemas.microsoft.com/office/powerpoint/2010/main" val="1047610951"/>
+        <p14:creationId xmlns:p14="http://schemas.microsoft.com/office/powerpoint/2010/main" val="1688200546"/>
       </p:ext>
     </p:extLst>
   </p:cSld>
@@ -1658,7 +1658,7 @@
           <p:cNvPr id="2" name="タイトル 1">
             <a:extLst>
               <a:ext uri="{FF2B5EF4-FFF2-40B4-BE49-F238E27FC236}">
-                <a16:creationId xmlns:a16="http://schemas.microsoft.com/office/drawing/2014/main" id="{D9A196AB-603A-C6D4-AED9-29DBE8EF6519}"/>
+                <a16:creationId xmlns:a16="http://schemas.microsoft.com/office/drawing/2014/main" id="{49C0895A-A6F0-B812-1458-330C44814294}"/>
               </a:ext>
             </a:extLst>
           </p:cNvPr>
@@ -1691,7 +1691,7 @@
           <p:cNvPr id="3" name="テキスト プレースホルダー 2">
             <a:extLst>
               <a:ext uri="{FF2B5EF4-FFF2-40B4-BE49-F238E27FC236}">
-                <a16:creationId xmlns:a16="http://schemas.microsoft.com/office/drawing/2014/main" id="{680EDFFB-22A8-4B8D-5C86-DCB1C2B9BF66}"/>
+                <a16:creationId xmlns:a16="http://schemas.microsoft.com/office/drawing/2014/main" id="{C49E3CEE-F8BB-38E4-9DC7-C300EB1B52A9}"/>
               </a:ext>
             </a:extLst>
           </p:cNvPr>
@@ -1762,7 +1762,7 @@
           <p:cNvPr id="4" name="コンテンツ プレースホルダー 3">
             <a:extLst>
               <a:ext uri="{FF2B5EF4-FFF2-40B4-BE49-F238E27FC236}">
-                <a16:creationId xmlns:a16="http://schemas.microsoft.com/office/drawing/2014/main" id="{DFCE9444-4D3B-AC7B-B954-8A7D4F9DF32E}"/>
+                <a16:creationId xmlns:a16="http://schemas.microsoft.com/office/drawing/2014/main" id="{C2FE9BCC-5D34-E988-2F79-0842FEDCD7B3}"/>
               </a:ext>
             </a:extLst>
           </p:cNvPr>
@@ -1856,7 +1856,7 @@
           <p:cNvPr id="5" name="テキスト プレースホルダー 4">
             <a:extLst>
               <a:ext uri="{FF2B5EF4-FFF2-40B4-BE49-F238E27FC236}">
-                <a16:creationId xmlns:a16="http://schemas.microsoft.com/office/drawing/2014/main" id="{959B5E05-A37B-AB74-3507-103510345E3C}"/>
+                <a16:creationId xmlns:a16="http://schemas.microsoft.com/office/drawing/2014/main" id="{4CD9B762-FD5E-9FE8-2F25-BA0EC4ECFB1E}"/>
               </a:ext>
             </a:extLst>
           </p:cNvPr>
@@ -1927,7 +1927,7 @@
           <p:cNvPr id="6" name="コンテンツ プレースホルダー 5">
             <a:extLst>
               <a:ext uri="{FF2B5EF4-FFF2-40B4-BE49-F238E27FC236}">
-                <a16:creationId xmlns:a16="http://schemas.microsoft.com/office/drawing/2014/main" id="{E23E718F-DFE1-A405-E425-CD116E4C19CD}"/>
+                <a16:creationId xmlns:a16="http://schemas.microsoft.com/office/drawing/2014/main" id="{0F5C00EF-A20E-C4B1-D96B-6C846061D8C5}"/>
               </a:ext>
             </a:extLst>
           </p:cNvPr>
@@ -2021,7 +2021,7 @@
           <p:cNvPr id="7" name="日付プレースホルダー 6">
             <a:extLst>
               <a:ext uri="{FF2B5EF4-FFF2-40B4-BE49-F238E27FC236}">
-                <a16:creationId xmlns:a16="http://schemas.microsoft.com/office/drawing/2014/main" id="{BFECFBBB-2B19-B9D8-BC4A-EACCF03A9A1F}"/>
+                <a16:creationId xmlns:a16="http://schemas.microsoft.com/office/drawing/2014/main" id="{A92703DC-5DAC-B9E8-2B0E-F8B3A8BAC9ED}"/>
               </a:ext>
             </a:extLst>
           </p:cNvPr>
@@ -2037,7 +2037,7 @@
           <a:bodyPr/>
           <a:lstStyle/>
           <a:p>
-            <a:fld id="{0D8922B8-D78D-4F2F-BBEC-BBA9B4FE2134}" type="datetimeFigureOut">
+            <a:fld id="{FE68CC9A-C38D-4B8D-9576-3E25274D76C0}" type="datetimeFigureOut">
               <a:rPr kumimoji="1" lang="ja-JP" altLang="en-US" smtClean="0"/>
               <a:t>2026/7/30</a:t>
             </a:fld>
@@ -2050,7 +2050,7 @@
           <p:cNvPr id="8" name="フッター プレースホルダー 7">
             <a:extLst>
               <a:ext uri="{FF2B5EF4-FFF2-40B4-BE49-F238E27FC236}">
-                <a16:creationId xmlns:a16="http://schemas.microsoft.com/office/drawing/2014/main" id="{6B3C04B3-72BE-7BA3-E4AE-EDF188C84BAA}"/>
+                <a16:creationId xmlns:a16="http://schemas.microsoft.com/office/drawing/2014/main" id="{BA8A4781-212A-488F-AA9D-2C0E4061D982}"/>
               </a:ext>
             </a:extLst>
           </p:cNvPr>
@@ -2075,7 +2075,7 @@
           <p:cNvPr id="9" name="スライド番号プレースホルダー 8">
             <a:extLst>
               <a:ext uri="{FF2B5EF4-FFF2-40B4-BE49-F238E27FC236}">
-                <a16:creationId xmlns:a16="http://schemas.microsoft.com/office/drawing/2014/main" id="{7995AAA2-35E6-B592-3904-18F3DD6EB580}"/>
+                <a16:creationId xmlns:a16="http://schemas.microsoft.com/office/drawing/2014/main" id="{B34F6E73-0218-ABEA-BF0F-B11C45CBD3A9}"/>
               </a:ext>
             </a:extLst>
           </p:cNvPr>
@@ -2091,7 +2091,7 @@
           <a:bodyPr/>
           <a:lstStyle/>
           <a:p>
-            <a:fld id="{DFFD2848-80BF-456E-A33A-332F56BCF303}" type="slidenum">
+            <a:fld id="{C19469CC-0BB0-45C6-A481-B64D40FCAEEE}" type="slidenum">
               <a:rPr kumimoji="1" lang="ja-JP" altLang="en-US" smtClean="0"/>
               <a:t>‹#›</a:t>
             </a:fld>
@@ -2102,7 +2102,7 @@
     </p:spTree>
     <p:extLst>
       <p:ext uri="{BB962C8B-B14F-4D97-AF65-F5344CB8AC3E}">
-        <p14:creationId xmlns:p14="http://schemas.microsoft.com/office/powerpoint/2010/main" val="767894402"/>
+        <p14:creationId xmlns:p14="http://schemas.microsoft.com/office/powerpoint/2010/main" val="347546345"/>
       </p:ext>
     </p:extLst>
   </p:cSld>
@@ -2134,7 +2134,7 @@
           <p:cNvPr id="2" name="タイトル 1">
             <a:extLst>
               <a:ext uri="{FF2B5EF4-FFF2-40B4-BE49-F238E27FC236}">
-                <a16:creationId xmlns:a16="http://schemas.microsoft.com/office/drawing/2014/main" id="{41669A30-2DD1-AD94-7E63-91205E2FAB7A}"/>
+                <a16:creationId xmlns:a16="http://schemas.microsoft.com/office/drawing/2014/main" id="{451B97DA-C297-093D-CF2D-590E2F82C534}"/>
               </a:ext>
             </a:extLst>
           </p:cNvPr>
@@ -2162,7 +2162,7 @@
           <p:cNvPr id="3" name="日付プレースホルダー 2">
             <a:extLst>
               <a:ext uri="{FF2B5EF4-FFF2-40B4-BE49-F238E27FC236}">
-                <a16:creationId xmlns:a16="http://schemas.microsoft.com/office/drawing/2014/main" id="{000C3B11-6CF7-277D-306F-69BD2B7C2E48}"/>
+                <a16:creationId xmlns:a16="http://schemas.microsoft.com/office/drawing/2014/main" id="{243622AF-6378-DE65-0410-DA8D923144F3}"/>
               </a:ext>
             </a:extLst>
           </p:cNvPr>
@@ -2178,7 +2178,7 @@
           <a:bodyPr/>
           <a:lstStyle/>
           <a:p>
-            <a:fld id="{0D8922B8-D78D-4F2F-BBEC-BBA9B4FE2134}" type="datetimeFigureOut">
+            <a:fld id="{FE68CC9A-C38D-4B8D-9576-3E25274D76C0}" type="datetimeFigureOut">
               <a:rPr kumimoji="1" lang="ja-JP" altLang="en-US" smtClean="0"/>
               <a:t>2026/7/30</a:t>
             </a:fld>
@@ -2191,7 +2191,7 @@
           <p:cNvPr id="4" name="フッター プレースホルダー 3">
             <a:extLst>
               <a:ext uri="{FF2B5EF4-FFF2-40B4-BE49-F238E27FC236}">
-                <a16:creationId xmlns:a16="http://schemas.microsoft.com/office/drawing/2014/main" id="{5CDBC792-CD05-8979-D1A4-3B27D71E5008}"/>
+                <a16:creationId xmlns:a16="http://schemas.microsoft.com/office/drawing/2014/main" id="{09F3103E-8842-9831-3D7F-65C45C0805D6}"/>
               </a:ext>
             </a:extLst>
           </p:cNvPr>
@@ -2216,7 +2216,7 @@
           <p:cNvPr id="5" name="スライド番号プレースホルダー 4">
             <a:extLst>
               <a:ext uri="{FF2B5EF4-FFF2-40B4-BE49-F238E27FC236}">
-                <a16:creationId xmlns:a16="http://schemas.microsoft.com/office/drawing/2014/main" id="{1F5423CD-39F2-C601-4B6E-2473F88EB397}"/>
+                <a16:creationId xmlns:a16="http://schemas.microsoft.com/office/drawing/2014/main" id="{F60906E3-43B2-EA40-3A6D-027BE3DA48A4}"/>
               </a:ext>
             </a:extLst>
           </p:cNvPr>
@@ -2232,7 +2232,7 @@
           <a:bodyPr/>
           <a:lstStyle/>
           <a:p>
-            <a:fld id="{DFFD2848-80BF-456E-A33A-332F56BCF303}" type="slidenum">
+            <a:fld id="{C19469CC-0BB0-45C6-A481-B64D40FCAEEE}" type="slidenum">
               <a:rPr kumimoji="1" lang="ja-JP" altLang="en-US" smtClean="0"/>
               <a:t>‹#›</a:t>
             </a:fld>
@@ -2243,7 +2243,7 @@
     </p:spTree>
     <p:extLst>
       <p:ext uri="{BB962C8B-B14F-4D97-AF65-F5344CB8AC3E}">
-        <p14:creationId xmlns:p14="http://schemas.microsoft.com/office/powerpoint/2010/main" val="2631498336"/>
+        <p14:creationId xmlns:p14="http://schemas.microsoft.com/office/powerpoint/2010/main" val="1532134075"/>
       </p:ext>
     </p:extLst>
   </p:cSld>
@@ -2275,7 +2275,7 @@
           <p:cNvPr id="2" name="日付プレースホルダー 1">
             <a:extLst>
               <a:ext uri="{FF2B5EF4-FFF2-40B4-BE49-F238E27FC236}">
-                <a16:creationId xmlns:a16="http://schemas.microsoft.com/office/drawing/2014/main" id="{968B5C59-263C-FA0F-9A25-4C0EE2F1D64D}"/>
+                <a16:creationId xmlns:a16="http://schemas.microsoft.com/office/drawing/2014/main" id="{116DA804-A3F0-6BE9-2A86-8D1EDDC358E2}"/>
               </a:ext>
             </a:extLst>
           </p:cNvPr>
@@ -2291,7 +2291,7 @@
           <a:bodyPr/>
           <a:lstStyle/>
           <a:p>
-            <a:fld id="{0D8922B8-D78D-4F2F-BBEC-BBA9B4FE2134}" type="datetimeFigureOut">
+            <a:fld id="{FE68CC9A-C38D-4B8D-9576-3E25274D76C0}" type="datetimeFigureOut">
               <a:rPr kumimoji="1" lang="ja-JP" altLang="en-US" smtClean="0"/>
               <a:t>2026/7/30</a:t>
             </a:fld>
@@ -2304,7 +2304,7 @@
           <p:cNvPr id="3" name="フッター プレースホルダー 2">
             <a:extLst>
               <a:ext uri="{FF2B5EF4-FFF2-40B4-BE49-F238E27FC236}">
-                <a16:creationId xmlns:a16="http://schemas.microsoft.com/office/drawing/2014/main" id="{7F4F4D1F-31E0-4A12-444F-F6AD79CED698}"/>
+                <a16:creationId xmlns:a16="http://schemas.microsoft.com/office/drawing/2014/main" id="{541FE191-C5B8-37F2-A39A-57734D9E4E54}"/>
               </a:ext>
             </a:extLst>
           </p:cNvPr>
@@ -2329,7 +2329,7 @@
           <p:cNvPr id="4" name="スライド番号プレースホルダー 3">
             <a:extLst>
               <a:ext uri="{FF2B5EF4-FFF2-40B4-BE49-F238E27FC236}">
-                <a16:creationId xmlns:a16="http://schemas.microsoft.com/office/drawing/2014/main" id="{3BC56B72-31B8-8EEB-0A32-8FFB394D1211}"/>
+                <a16:creationId xmlns:a16="http://schemas.microsoft.com/office/drawing/2014/main" id="{45B296CC-B6DD-A20E-CB66-48EEF578DB6D}"/>
               </a:ext>
             </a:extLst>
           </p:cNvPr>
@@ -2345,7 +2345,7 @@
           <a:bodyPr/>
           <a:lstStyle/>
           <a:p>
-            <a:fld id="{DFFD2848-80BF-456E-A33A-332F56BCF303}" type="slidenum">
+            <a:fld id="{C19469CC-0BB0-45C6-A481-B64D40FCAEEE}" type="slidenum">
               <a:rPr kumimoji="1" lang="ja-JP" altLang="en-US" smtClean="0"/>
               <a:t>‹#›</a:t>
             </a:fld>
@@ -2356,7 +2356,7 @@
     </p:spTree>
     <p:extLst>
       <p:ext uri="{BB962C8B-B14F-4D97-AF65-F5344CB8AC3E}">
-        <p14:creationId xmlns:p14="http://schemas.microsoft.com/office/powerpoint/2010/main" val="3136010463"/>
+        <p14:creationId xmlns:p14="http://schemas.microsoft.com/office/powerpoint/2010/main" val="1376964852"/>
       </p:ext>
     </p:extLst>
   </p:cSld>
@@ -2388,7 +2388,7 @@
           <p:cNvPr id="2" name="タイトル 1">
             <a:extLst>
               <a:ext uri="{FF2B5EF4-FFF2-40B4-BE49-F238E27FC236}">
-                <a16:creationId xmlns:a16="http://schemas.microsoft.com/office/drawing/2014/main" id="{FA02ECE8-164A-F0FA-1AE4-E059751478CD}"/>
+                <a16:creationId xmlns:a16="http://schemas.microsoft.com/office/drawing/2014/main" id="{809C02C0-F9AA-5482-D094-0B59291382FA}"/>
               </a:ext>
             </a:extLst>
           </p:cNvPr>
@@ -2425,7 +2425,7 @@
           <p:cNvPr id="3" name="コンテンツ プレースホルダー 2">
             <a:extLst>
               <a:ext uri="{FF2B5EF4-FFF2-40B4-BE49-F238E27FC236}">
-                <a16:creationId xmlns:a16="http://schemas.microsoft.com/office/drawing/2014/main" id="{918834CE-CD21-D84C-8C92-08854BA59872}"/>
+                <a16:creationId xmlns:a16="http://schemas.microsoft.com/office/drawing/2014/main" id="{BB7F67B9-0145-FA3D-704C-5F9ABE6C1C94}"/>
               </a:ext>
             </a:extLst>
           </p:cNvPr>
@@ -2547,7 +2547,7 @@
           <p:cNvPr id="4" name="テキスト プレースホルダー 3">
             <a:extLst>
               <a:ext uri="{FF2B5EF4-FFF2-40B4-BE49-F238E27FC236}">
-                <a16:creationId xmlns:a16="http://schemas.microsoft.com/office/drawing/2014/main" id="{6BF6A83B-41FF-48F9-C9B6-28EACCD4DF7C}"/>
+                <a16:creationId xmlns:a16="http://schemas.microsoft.com/office/drawing/2014/main" id="{19C2C3AA-674A-7C14-080A-99038A6F87DF}"/>
               </a:ext>
             </a:extLst>
           </p:cNvPr>
@@ -2618,7 +2618,7 @@
           <p:cNvPr id="5" name="日付プレースホルダー 4">
             <a:extLst>
               <a:ext uri="{FF2B5EF4-FFF2-40B4-BE49-F238E27FC236}">
-                <a16:creationId xmlns:a16="http://schemas.microsoft.com/office/drawing/2014/main" id="{53DCF689-64F5-0F0E-8AAC-DCB3C15AFA59}"/>
+                <a16:creationId xmlns:a16="http://schemas.microsoft.com/office/drawing/2014/main" id="{7CA20B2E-DE4F-ECDB-30B0-A6D50EB128EB}"/>
               </a:ext>
             </a:extLst>
           </p:cNvPr>
@@ -2634,7 +2634,7 @@
           <a:bodyPr/>
           <a:lstStyle/>
           <a:p>
-            <a:fld id="{0D8922B8-D78D-4F2F-BBEC-BBA9B4FE2134}" type="datetimeFigureOut">
+            <a:fld id="{FE68CC9A-C38D-4B8D-9576-3E25274D76C0}" type="datetimeFigureOut">
               <a:rPr kumimoji="1" lang="ja-JP" altLang="en-US" smtClean="0"/>
               <a:t>2026/7/30</a:t>
             </a:fld>
@@ -2647,7 +2647,7 @@
           <p:cNvPr id="6" name="フッター プレースホルダー 5">
             <a:extLst>
               <a:ext uri="{FF2B5EF4-FFF2-40B4-BE49-F238E27FC236}">
-                <a16:creationId xmlns:a16="http://schemas.microsoft.com/office/drawing/2014/main" id="{948782DE-55B5-7AF4-2076-376B722BE1B0}"/>
+                <a16:creationId xmlns:a16="http://schemas.microsoft.com/office/drawing/2014/main" id="{19075A31-6EF1-B4E5-E8AD-CDEDDBAA054B}"/>
               </a:ext>
             </a:extLst>
           </p:cNvPr>
@@ -2672,7 +2672,7 @@
           <p:cNvPr id="7" name="スライド番号プレースホルダー 6">
             <a:extLst>
               <a:ext uri="{FF2B5EF4-FFF2-40B4-BE49-F238E27FC236}">
-                <a16:creationId xmlns:a16="http://schemas.microsoft.com/office/drawing/2014/main" id="{529C0151-3C5A-460B-02D0-DF36A3B47181}"/>
+                <a16:creationId xmlns:a16="http://schemas.microsoft.com/office/drawing/2014/main" id="{EDCE36D5-2818-B7E3-AAB5-F10EA47C8B74}"/>
               </a:ext>
             </a:extLst>
           </p:cNvPr>
@@ -2688,7 +2688,7 @@
           <a:bodyPr/>
           <a:lstStyle/>
           <a:p>
-            <a:fld id="{DFFD2848-80BF-456E-A33A-332F56BCF303}" type="slidenum">
+            <a:fld id="{C19469CC-0BB0-45C6-A481-B64D40FCAEEE}" type="slidenum">
               <a:rPr kumimoji="1" lang="ja-JP" altLang="en-US" smtClean="0"/>
               <a:t>‹#›</a:t>
             </a:fld>
@@ -2699,7 +2699,7 @@
     </p:spTree>
     <p:extLst>
       <p:ext uri="{BB962C8B-B14F-4D97-AF65-F5344CB8AC3E}">
-        <p14:creationId xmlns:p14="http://schemas.microsoft.com/office/powerpoint/2010/main" val="2097462169"/>
+        <p14:creationId xmlns:p14="http://schemas.microsoft.com/office/powerpoint/2010/main" val="1762839335"/>
       </p:ext>
     </p:extLst>
   </p:cSld>
@@ -2731,7 +2731,7 @@
           <p:cNvPr id="2" name="タイトル 1">
             <a:extLst>
               <a:ext uri="{FF2B5EF4-FFF2-40B4-BE49-F238E27FC236}">
-                <a16:creationId xmlns:a16="http://schemas.microsoft.com/office/drawing/2014/main" id="{399B510E-1128-AD63-A8EF-D59157274846}"/>
+                <a16:creationId xmlns:a16="http://schemas.microsoft.com/office/drawing/2014/main" id="{E7B6FF43-8E3B-F9E0-8139-DC2706030DA7}"/>
               </a:ext>
             </a:extLst>
           </p:cNvPr>
@@ -2768,7 +2768,7 @@
           <p:cNvPr id="3" name="図プレースホルダー 2">
             <a:extLst>
               <a:ext uri="{FF2B5EF4-FFF2-40B4-BE49-F238E27FC236}">
-                <a16:creationId xmlns:a16="http://schemas.microsoft.com/office/drawing/2014/main" id="{7DD469FD-613E-E1AA-7E19-774F693C86D4}"/>
+                <a16:creationId xmlns:a16="http://schemas.microsoft.com/office/drawing/2014/main" id="{B3FCEEC9-8DB7-1DD8-6552-ECFAAD4F768D}"/>
               </a:ext>
             </a:extLst>
           </p:cNvPr>
@@ -2835,7 +2835,7 @@
           <p:cNvPr id="4" name="テキスト プレースホルダー 3">
             <a:extLst>
               <a:ext uri="{FF2B5EF4-FFF2-40B4-BE49-F238E27FC236}">
-                <a16:creationId xmlns:a16="http://schemas.microsoft.com/office/drawing/2014/main" id="{236C79DA-119B-B6D1-B4FF-1055E1C40F79}"/>
+                <a16:creationId xmlns:a16="http://schemas.microsoft.com/office/drawing/2014/main" id="{136F6666-D87B-DEEF-6FC1-98BED0602C8C}"/>
               </a:ext>
             </a:extLst>
           </p:cNvPr>
@@ -2906,7 +2906,7 @@
           <p:cNvPr id="5" name="日付プレースホルダー 4">
             <a:extLst>
               <a:ext uri="{FF2B5EF4-FFF2-40B4-BE49-F238E27FC236}">
-                <a16:creationId xmlns:a16="http://schemas.microsoft.com/office/drawing/2014/main" id="{AED02633-42E9-5493-C639-3FC258ED986C}"/>
+                <a16:creationId xmlns:a16="http://schemas.microsoft.com/office/drawing/2014/main" id="{9639366E-5C95-6F7F-B04C-59F0867415C2}"/>
               </a:ext>
             </a:extLst>
           </p:cNvPr>
@@ -2922,7 +2922,7 @@
           <a:bodyPr/>
           <a:lstStyle/>
           <a:p>
-            <a:fld id="{0D8922B8-D78D-4F2F-BBEC-BBA9B4FE2134}" type="datetimeFigureOut">
+            <a:fld id="{FE68CC9A-C38D-4B8D-9576-3E25274D76C0}" type="datetimeFigureOut">
               <a:rPr kumimoji="1" lang="ja-JP" altLang="en-US" smtClean="0"/>
               <a:t>2026/7/30</a:t>
             </a:fld>
@@ -2935,7 +2935,7 @@
           <p:cNvPr id="6" name="フッター プレースホルダー 5">
             <a:extLst>
               <a:ext uri="{FF2B5EF4-FFF2-40B4-BE49-F238E27FC236}">
-                <a16:creationId xmlns:a16="http://schemas.microsoft.com/office/drawing/2014/main" id="{7C2F49EF-688D-43DC-6AD9-BEE1E3B52761}"/>
+                <a16:creationId xmlns:a16="http://schemas.microsoft.com/office/drawing/2014/main" id="{B0EB574D-6EBA-A019-9CFE-CE21C9307671}"/>
               </a:ext>
             </a:extLst>
           </p:cNvPr>
@@ -2960,7 +2960,7 @@
           <p:cNvPr id="7" name="スライド番号プレースホルダー 6">
             <a:extLst>
               <a:ext uri="{FF2B5EF4-FFF2-40B4-BE49-F238E27FC236}">
-                <a16:creationId xmlns:a16="http://schemas.microsoft.com/office/drawing/2014/main" id="{EAFB4114-4B23-5BC5-E5D9-9E14D59A0E9F}"/>
+                <a16:creationId xmlns:a16="http://schemas.microsoft.com/office/drawing/2014/main" id="{B8161212-7DF0-C169-F41E-BE3FF8017BB5}"/>
               </a:ext>
             </a:extLst>
           </p:cNvPr>
@@ -2976,7 +2976,7 @@
           <a:bodyPr/>
           <a:lstStyle/>
           <a:p>
-            <a:fld id="{DFFD2848-80BF-456E-A33A-332F56BCF303}" type="slidenum">
+            <a:fld id="{C19469CC-0BB0-45C6-A481-B64D40FCAEEE}" type="slidenum">
               <a:rPr kumimoji="1" lang="ja-JP" altLang="en-US" smtClean="0"/>
               <a:t>‹#›</a:t>
             </a:fld>
@@ -2987,7 +2987,7 @@
     </p:spTree>
     <p:extLst>
       <p:ext uri="{BB962C8B-B14F-4D97-AF65-F5344CB8AC3E}">
-        <p14:creationId xmlns:p14="http://schemas.microsoft.com/office/powerpoint/2010/main" val="1309977245"/>
+        <p14:creationId xmlns:p14="http://schemas.microsoft.com/office/powerpoint/2010/main" val="2304664478"/>
       </p:ext>
     </p:extLst>
   </p:cSld>
@@ -3024,7 +3024,7 @@
           <p:cNvPr id="2" name="タイトル プレースホルダー 1">
             <a:extLst>
               <a:ext uri="{FF2B5EF4-FFF2-40B4-BE49-F238E27FC236}">
-                <a16:creationId xmlns:a16="http://schemas.microsoft.com/office/drawing/2014/main" id="{B3F9BED5-0F05-28D2-F315-51565D158D79}"/>
+                <a16:creationId xmlns:a16="http://schemas.microsoft.com/office/drawing/2014/main" id="{3C44BE67-81EA-8179-7C92-5DD627CE1AF9}"/>
               </a:ext>
             </a:extLst>
           </p:cNvPr>
@@ -3062,7 +3062,7 @@
           <p:cNvPr id="3" name="テキスト プレースホルダー 2">
             <a:extLst>
               <a:ext uri="{FF2B5EF4-FFF2-40B4-BE49-F238E27FC236}">
-                <a16:creationId xmlns:a16="http://schemas.microsoft.com/office/drawing/2014/main" id="{1F51B5AE-3EA2-B532-247C-68009A5A1FD6}"/>
+                <a16:creationId xmlns:a16="http://schemas.microsoft.com/office/drawing/2014/main" id="{60B1E648-8876-2927-FE3B-CA75817783E6}"/>
               </a:ext>
             </a:extLst>
           </p:cNvPr>
@@ -3161,7 +3161,7 @@
           <p:cNvPr id="4" name="日付プレースホルダー 3">
             <a:extLst>
               <a:ext uri="{FF2B5EF4-FFF2-40B4-BE49-F238E27FC236}">
-                <a16:creationId xmlns:a16="http://schemas.microsoft.com/office/drawing/2014/main" id="{9EE4D377-0835-86BD-BE38-818E94890AB6}"/>
+                <a16:creationId xmlns:a16="http://schemas.microsoft.com/office/drawing/2014/main" id="{35A74B88-BC1D-8FCD-0F2A-07F6097D4832}"/>
               </a:ext>
             </a:extLst>
           </p:cNvPr>
@@ -3195,7 +3195,7 @@
             </a:lvl1pPr>
           </a:lstStyle>
           <a:p>
-            <a:fld id="{0D8922B8-D78D-4F2F-BBEC-BBA9B4FE2134}" type="datetimeFigureOut">
+            <a:fld id="{FE68CC9A-C38D-4B8D-9576-3E25274D76C0}" type="datetimeFigureOut">
               <a:rPr kumimoji="1" lang="ja-JP" altLang="en-US" smtClean="0"/>
               <a:t>2026/7/30</a:t>
             </a:fld>
@@ -3208,7 +3208,7 @@
           <p:cNvPr id="5" name="フッター プレースホルダー 4">
             <a:extLst>
               <a:ext uri="{FF2B5EF4-FFF2-40B4-BE49-F238E27FC236}">
-                <a16:creationId xmlns:a16="http://schemas.microsoft.com/office/drawing/2014/main" id="{528687F9-3C83-8249-E411-7B7BAED0ADC3}"/>
+                <a16:creationId xmlns:a16="http://schemas.microsoft.com/office/drawing/2014/main" id="{7F86443F-64DD-3364-573F-7DFF505758BF}"/>
               </a:ext>
             </a:extLst>
           </p:cNvPr>
@@ -3251,7 +3251,7 @@
           <p:cNvPr id="6" name="スライド番号プレースホルダー 5">
             <a:extLst>
               <a:ext uri="{FF2B5EF4-FFF2-40B4-BE49-F238E27FC236}">
-                <a16:creationId xmlns:a16="http://schemas.microsoft.com/office/drawing/2014/main" id="{FF60A0D9-4283-4A10-CBC6-7ED1E9E0516A}"/>
+                <a16:creationId xmlns:a16="http://schemas.microsoft.com/office/drawing/2014/main" id="{7AA34BA8-70F1-0717-963D-56B53F9D28C0}"/>
               </a:ext>
             </a:extLst>
           </p:cNvPr>
@@ -3285,7 +3285,7 @@
             </a:lvl1pPr>
           </a:lstStyle>
           <a:p>
-            <a:fld id="{DFFD2848-80BF-456E-A33A-332F56BCF303}" type="slidenum">
+            <a:fld id="{C19469CC-0BB0-45C6-A481-B64D40FCAEEE}" type="slidenum">
               <a:rPr kumimoji="1" lang="ja-JP" altLang="en-US" smtClean="0"/>
               <a:t>‹#›</a:t>
             </a:fld>
@@ -3296,7 +3296,7 @@
     </p:spTree>
     <p:extLst>
       <p:ext uri="{BB962C8B-B14F-4D97-AF65-F5344CB8AC3E}">
-        <p14:creationId xmlns:p14="http://schemas.microsoft.com/office/powerpoint/2010/main" val="2637694899"/>
+        <p14:creationId xmlns:p14="http://schemas.microsoft.com/office/powerpoint/2010/main" val="1550660506"/>
       </p:ext>
     </p:extLst>
   </p:cSld>
@@ -3619,7 +3619,7 @@
           <p:cNvPr id="2" name="テキスト ボックス 1">
             <a:extLst>
               <a:ext uri="{FF2B5EF4-FFF2-40B4-BE49-F238E27FC236}">
-                <a16:creationId xmlns:a16="http://schemas.microsoft.com/office/drawing/2014/main" id="{6E9B87A2-F419-A42A-9D3B-D95083EC25DE}"/>
+                <a16:creationId xmlns:a16="http://schemas.microsoft.com/office/drawing/2014/main" id="{C3654007-6918-F57F-947B-CECA7E27CEB8}"/>
               </a:ext>
             </a:extLst>
           </p:cNvPr>
@@ -3665,7 +3665,7 @@
           <p:cNvPr id="3" name="テキスト ボックス 2">
             <a:extLst>
               <a:ext uri="{FF2B5EF4-FFF2-40B4-BE49-F238E27FC236}">
-                <a16:creationId xmlns:a16="http://schemas.microsoft.com/office/drawing/2014/main" id="{3CBF3012-AE2E-F5CA-3327-8ED98481561A}"/>
+                <a16:creationId xmlns:a16="http://schemas.microsoft.com/office/drawing/2014/main" id="{8D7585FD-F514-A83D-6F02-8DA746D2F11D}"/>
               </a:ext>
             </a:extLst>
           </p:cNvPr>
@@ -3714,7 +3714,7 @@
           <p:cNvPr id="4" name="テキスト ボックス 3">
             <a:extLst>
               <a:ext uri="{FF2B5EF4-FFF2-40B4-BE49-F238E27FC236}">
-                <a16:creationId xmlns:a16="http://schemas.microsoft.com/office/drawing/2014/main" id="{91AC5E93-FB18-3BA0-4E86-F774DAFA8B5E}"/>
+                <a16:creationId xmlns:a16="http://schemas.microsoft.com/office/drawing/2014/main" id="{41101F7F-CCB2-EAB4-68B3-E4E77412136B}"/>
               </a:ext>
             </a:extLst>
           </p:cNvPr>
@@ -3754,7 +3754,7 @@
           <p:cNvPr id="5" name="テキスト ボックス 4">
             <a:extLst>
               <a:ext uri="{FF2B5EF4-FFF2-40B4-BE49-F238E27FC236}">
-                <a16:creationId xmlns:a16="http://schemas.microsoft.com/office/drawing/2014/main" id="{7EC85CAC-46B8-59ED-0950-5ADA683FC78F}"/>
+                <a16:creationId xmlns:a16="http://schemas.microsoft.com/office/drawing/2014/main" id="{E0E82E1D-9AD4-0BAC-82BE-7BFEA2F1B991}"/>
               </a:ext>
             </a:extLst>
           </p:cNvPr>
@@ -3801,7 +3801,7 @@
             <a:hlinkClick r:id="" action="ppaction://media"/>
             <a:extLst>
               <a:ext uri="{FF2B5EF4-FFF2-40B4-BE49-F238E27FC236}">
-                <a16:creationId xmlns:a16="http://schemas.microsoft.com/office/drawing/2014/main" id="{172CE256-6E2B-D044-3070-58B480129C04}"/>
+                <a16:creationId xmlns:a16="http://schemas.microsoft.com/office/drawing/2014/main" id="{A4D2BEC9-E60F-EACB-6EF7-170067D85D61}"/>
               </a:ext>
             </a:extLst>
           </p:cNvPr>
@@ -3836,7 +3836,7 @@
     </p:spTree>
     <p:extLst>
       <p:ext uri="{BB962C8B-B14F-4D97-AF65-F5344CB8AC3E}">
-        <p14:creationId xmlns:p14="http://schemas.microsoft.com/office/powerpoint/2010/main" val="1496764233"/>
+        <p14:creationId xmlns:p14="http://schemas.microsoft.com/office/powerpoint/2010/main" val="3866787570"/>
       </p:ext>
     </p:extLst>
   </p:cSld>
@@ -3960,7 +3960,7 @@
           <p:cNvPr id="2" name="テキスト ボックス 1">
             <a:extLst>
               <a:ext uri="{FF2B5EF4-FFF2-40B4-BE49-F238E27FC236}">
-                <a16:creationId xmlns:a16="http://schemas.microsoft.com/office/drawing/2014/main" id="{DFC6DE88-D786-3A82-CF4D-23BFEF6A804C}"/>
+                <a16:creationId xmlns:a16="http://schemas.microsoft.com/office/drawing/2014/main" id="{633D5096-EA7D-0BBC-37E2-426D7A12B54C}"/>
               </a:ext>
             </a:extLst>
           </p:cNvPr>
@@ -4006,7 +4006,7 @@
           <p:cNvPr id="3" name="テキスト ボックス 2">
             <a:extLst>
               <a:ext uri="{FF2B5EF4-FFF2-40B4-BE49-F238E27FC236}">
-                <a16:creationId xmlns:a16="http://schemas.microsoft.com/office/drawing/2014/main" id="{1E57A12F-E893-60D3-7F64-D0F70138F82E}"/>
+                <a16:creationId xmlns:a16="http://schemas.microsoft.com/office/drawing/2014/main" id="{A8CFC6FB-7B3C-C637-A1AB-F5820A377E1B}"/>
               </a:ext>
             </a:extLst>
           </p:cNvPr>
@@ -4046,7 +4046,7 @@
           <p:cNvPr id="4" name="テキスト ボックス 3">
             <a:extLst>
               <a:ext uri="{FF2B5EF4-FFF2-40B4-BE49-F238E27FC236}">
-                <a16:creationId xmlns:a16="http://schemas.microsoft.com/office/drawing/2014/main" id="{8639ECBF-7524-150F-E8CD-50D9EB0E8036}"/>
+                <a16:creationId xmlns:a16="http://schemas.microsoft.com/office/drawing/2014/main" id="{0CFCD841-4797-5DFB-2D28-ED041E062A76}"/>
               </a:ext>
             </a:extLst>
           </p:cNvPr>
@@ -4110,7 +4110,7 @@
           <p:cNvPr id="5" name="テキスト ボックス 4">
             <a:extLst>
               <a:ext uri="{FF2B5EF4-FFF2-40B4-BE49-F238E27FC236}">
-                <a16:creationId xmlns:a16="http://schemas.microsoft.com/office/drawing/2014/main" id="{492BBCA0-C992-DCC6-21A4-690DBE891D29}"/>
+                <a16:creationId xmlns:a16="http://schemas.microsoft.com/office/drawing/2014/main" id="{3AB9F39C-4F32-3DA5-1E3A-C5171F29AC62}"/>
               </a:ext>
             </a:extLst>
           </p:cNvPr>
@@ -4157,7 +4157,7 @@
             <a:hlinkClick r:id="" action="ppaction://media"/>
             <a:extLst>
               <a:ext uri="{FF2B5EF4-FFF2-40B4-BE49-F238E27FC236}">
-                <a16:creationId xmlns:a16="http://schemas.microsoft.com/office/drawing/2014/main" id="{6EB93F0E-6E56-4EAF-D522-A7A16835C874}"/>
+                <a16:creationId xmlns:a16="http://schemas.microsoft.com/office/drawing/2014/main" id="{BA18A3F8-702E-567D-E497-09CCAF461F3A}"/>
               </a:ext>
             </a:extLst>
           </p:cNvPr>
@@ -4192,7 +4192,7 @@
     </p:spTree>
     <p:extLst>
       <p:ext uri="{BB962C8B-B14F-4D97-AF65-F5344CB8AC3E}">
-        <p14:creationId xmlns:p14="http://schemas.microsoft.com/office/powerpoint/2010/main" val="3654767877"/>
+        <p14:creationId xmlns:p14="http://schemas.microsoft.com/office/powerpoint/2010/main" val="1635147248"/>
       </p:ext>
     </p:extLst>
   </p:cSld>
@@ -4316,7 +4316,7 @@
           <p:cNvPr id="2" name="テキスト ボックス 1">
             <a:extLst>
               <a:ext uri="{FF2B5EF4-FFF2-40B4-BE49-F238E27FC236}">
-                <a16:creationId xmlns:a16="http://schemas.microsoft.com/office/drawing/2014/main" id="{436D6487-89AB-102F-DDBF-2AFFDD9C6AE1}"/>
+                <a16:creationId xmlns:a16="http://schemas.microsoft.com/office/drawing/2014/main" id="{3B2B47CC-B930-68FA-5DFB-DF57A5F1939E}"/>
               </a:ext>
             </a:extLst>
           </p:cNvPr>
@@ -4362,7 +4362,7 @@
           <p:cNvPr id="3" name="テキスト ボックス 2">
             <a:extLst>
               <a:ext uri="{FF2B5EF4-FFF2-40B4-BE49-F238E27FC236}">
-                <a16:creationId xmlns:a16="http://schemas.microsoft.com/office/drawing/2014/main" id="{88BB6EEE-59F6-73A1-2B64-65DBD60449C6}"/>
+                <a16:creationId xmlns:a16="http://schemas.microsoft.com/office/drawing/2014/main" id="{30E79E5C-D895-FEEE-0FB5-05FE2273A5F4}"/>
               </a:ext>
             </a:extLst>
           </p:cNvPr>
@@ -4402,7 +4402,7 @@
           <p:cNvPr id="4" name="テキスト ボックス 3">
             <a:extLst>
               <a:ext uri="{FF2B5EF4-FFF2-40B4-BE49-F238E27FC236}">
-                <a16:creationId xmlns:a16="http://schemas.microsoft.com/office/drawing/2014/main" id="{02E11788-AC5A-ABD8-2281-EF45617EBB3B}"/>
+                <a16:creationId xmlns:a16="http://schemas.microsoft.com/office/drawing/2014/main" id="{38E69B66-5549-7AF0-4E9E-579610CA5D33}"/>
               </a:ext>
             </a:extLst>
           </p:cNvPr>
@@ -4497,7 +4497,7 @@
           <p:cNvPr id="5" name="テキスト ボックス 4">
             <a:extLst>
               <a:ext uri="{FF2B5EF4-FFF2-40B4-BE49-F238E27FC236}">
-                <a16:creationId xmlns:a16="http://schemas.microsoft.com/office/drawing/2014/main" id="{1152C595-81B3-C61C-16DA-96421CEAB6EF}"/>
+                <a16:creationId xmlns:a16="http://schemas.microsoft.com/office/drawing/2014/main" id="{818DB94E-6A3B-75E5-FA52-B6F1BFCA04B7}"/>
               </a:ext>
             </a:extLst>
           </p:cNvPr>
@@ -4544,7 +4544,7 @@
             <a:hlinkClick r:id="" action="ppaction://media"/>
             <a:extLst>
               <a:ext uri="{FF2B5EF4-FFF2-40B4-BE49-F238E27FC236}">
-                <a16:creationId xmlns:a16="http://schemas.microsoft.com/office/drawing/2014/main" id="{04B180EF-8C32-4A77-EBE7-4BC9EE68F28A}"/>
+                <a16:creationId xmlns:a16="http://schemas.microsoft.com/office/drawing/2014/main" id="{DC40C81B-26F0-F153-A81E-876CEA01B81F}"/>
               </a:ext>
             </a:extLst>
           </p:cNvPr>
@@ -4579,7 +4579,7 @@
     </p:spTree>
     <p:extLst>
       <p:ext uri="{BB962C8B-B14F-4D97-AF65-F5344CB8AC3E}">
-        <p14:creationId xmlns:p14="http://schemas.microsoft.com/office/powerpoint/2010/main" val="4228488931"/>
+        <p14:creationId xmlns:p14="http://schemas.microsoft.com/office/powerpoint/2010/main" val="3062365591"/>
       </p:ext>
     </p:extLst>
   </p:cSld>
@@ -4703,7 +4703,7 @@
           <p:cNvPr id="2" name="テキスト ボックス 1">
             <a:extLst>
               <a:ext uri="{FF2B5EF4-FFF2-40B4-BE49-F238E27FC236}">
-                <a16:creationId xmlns:a16="http://schemas.microsoft.com/office/drawing/2014/main" id="{F8FB520E-0821-2130-1BA8-DEA14FA19986}"/>
+                <a16:creationId xmlns:a16="http://schemas.microsoft.com/office/drawing/2014/main" id="{B83109E9-85C8-3E4E-FD52-FB152929CB95}"/>
               </a:ext>
             </a:extLst>
           </p:cNvPr>
@@ -4749,7 +4749,7 @@
           <p:cNvPr id="3" name="テキスト ボックス 2">
             <a:extLst>
               <a:ext uri="{FF2B5EF4-FFF2-40B4-BE49-F238E27FC236}">
-                <a16:creationId xmlns:a16="http://schemas.microsoft.com/office/drawing/2014/main" id="{D3052AC0-2F94-EA46-4E9C-6685E63FC901}"/>
+                <a16:creationId xmlns:a16="http://schemas.microsoft.com/office/drawing/2014/main" id="{9FBBD292-01ED-06E3-C84D-56060A65B532}"/>
               </a:ext>
             </a:extLst>
           </p:cNvPr>
@@ -4789,7 +4789,7 @@
           <p:cNvPr id="4" name="テキスト ボックス 3">
             <a:extLst>
               <a:ext uri="{FF2B5EF4-FFF2-40B4-BE49-F238E27FC236}">
-                <a16:creationId xmlns:a16="http://schemas.microsoft.com/office/drawing/2014/main" id="{A7352E4B-6A76-1606-6428-B99FFDF75FB9}"/>
+                <a16:creationId xmlns:a16="http://schemas.microsoft.com/office/drawing/2014/main" id="{F3AA4A2E-612A-686A-4C29-D04CC32969FA}"/>
               </a:ext>
             </a:extLst>
           </p:cNvPr>
@@ -4899,7 +4899,7 @@
           <p:cNvPr id="5" name="テキスト ボックス 4">
             <a:extLst>
               <a:ext uri="{FF2B5EF4-FFF2-40B4-BE49-F238E27FC236}">
-                <a16:creationId xmlns:a16="http://schemas.microsoft.com/office/drawing/2014/main" id="{44F7A440-A89F-977E-2F8D-757655B3296D}"/>
+                <a16:creationId xmlns:a16="http://schemas.microsoft.com/office/drawing/2014/main" id="{5EB518E8-A803-A20F-5A3E-246B8C5EE5C1}"/>
               </a:ext>
             </a:extLst>
           </p:cNvPr>
@@ -4946,7 +4946,7 @@
             <a:hlinkClick r:id="" action="ppaction://media"/>
             <a:extLst>
               <a:ext uri="{FF2B5EF4-FFF2-40B4-BE49-F238E27FC236}">
-                <a16:creationId xmlns:a16="http://schemas.microsoft.com/office/drawing/2014/main" id="{B9CE6014-3B5B-E2E8-8693-0AC29EA99644}"/>
+                <a16:creationId xmlns:a16="http://schemas.microsoft.com/office/drawing/2014/main" id="{2596441B-D477-967B-064C-6215ACC095AA}"/>
               </a:ext>
             </a:extLst>
           </p:cNvPr>
@@ -4981,7 +4981,7 @@
     </p:spTree>
     <p:extLst>
       <p:ext uri="{BB962C8B-B14F-4D97-AF65-F5344CB8AC3E}">
-        <p14:creationId xmlns:p14="http://schemas.microsoft.com/office/powerpoint/2010/main" val="4115154735"/>
+        <p14:creationId xmlns:p14="http://schemas.microsoft.com/office/powerpoint/2010/main" val="2286329773"/>
       </p:ext>
     </p:extLst>
   </p:cSld>
@@ -5105,7 +5105,7 @@
           <p:cNvPr id="2" name="テキスト ボックス 1">
             <a:extLst>
               <a:ext uri="{FF2B5EF4-FFF2-40B4-BE49-F238E27FC236}">
-                <a16:creationId xmlns:a16="http://schemas.microsoft.com/office/drawing/2014/main" id="{56365E82-EB5F-19AC-FB2F-F234800BCEB8}"/>
+                <a16:creationId xmlns:a16="http://schemas.microsoft.com/office/drawing/2014/main" id="{3842C822-9CDC-1B75-AAA0-539F0926D9BB}"/>
               </a:ext>
             </a:extLst>
           </p:cNvPr>
@@ -5151,7 +5151,7 @@
           <p:cNvPr id="3" name="テキスト ボックス 2">
             <a:extLst>
               <a:ext uri="{FF2B5EF4-FFF2-40B4-BE49-F238E27FC236}">
-                <a16:creationId xmlns:a16="http://schemas.microsoft.com/office/drawing/2014/main" id="{B2B98CA8-8671-1CB1-87BF-3B88E58CF24F}"/>
+                <a16:creationId xmlns:a16="http://schemas.microsoft.com/office/drawing/2014/main" id="{829016DF-820C-0F95-B00D-8DD8E79409D7}"/>
               </a:ext>
             </a:extLst>
           </p:cNvPr>
@@ -5191,7 +5191,7 @@
           <p:cNvPr id="4" name="テキスト ボックス 3">
             <a:extLst>
               <a:ext uri="{FF2B5EF4-FFF2-40B4-BE49-F238E27FC236}">
-                <a16:creationId xmlns:a16="http://schemas.microsoft.com/office/drawing/2014/main" id="{B39E5ADF-E3B9-370F-09B0-FAF812F99F6F}"/>
+                <a16:creationId xmlns:a16="http://schemas.microsoft.com/office/drawing/2014/main" id="{20900527-5FAB-6B5E-8889-DBCFFD644C7C}"/>
               </a:ext>
             </a:extLst>
           </p:cNvPr>
@@ -5215,20 +5215,14 @@
           <a:lstStyle/>
           <a:p>
             <a:r>
-              <a:rPr kumimoji="1" lang="en-US" altLang="ja-JP" sz="2000">
+              <a:rPr kumimoji="1" lang="ja-JP" altLang="en-US" sz="2000">
                 <a:solidFill>
                   <a:srgbClr val="333333"/>
                 </a:solidFill>
                 <a:latin typeface="Arial" panose="020B0604020202020204" pitchFamily="34" charset="0"/>
               </a:rPr>
-              <a:t>Set confirmed custom domain</a:t>
-            </a:r>
-            <a:endParaRPr kumimoji="1" lang="ja-JP" altLang="en-US" sz="2000">
-              <a:solidFill>
-                <a:srgbClr val="333333"/>
-              </a:solidFill>
-              <a:latin typeface="Arial" panose="020B0604020202020204" pitchFamily="34" charset="0"/>
-            </a:endParaRPr>
+              <a:t>直近のコミットでは、実装の見直しと継続的な改善が行われました。</a:t>
+            </a:r>
           </a:p>
         </p:txBody>
       </p:sp>
@@ -5237,7 +5231,7 @@
           <p:cNvPr id="5" name="テキスト ボックス 4">
             <a:extLst>
               <a:ext uri="{FF2B5EF4-FFF2-40B4-BE49-F238E27FC236}">
-                <a16:creationId xmlns:a16="http://schemas.microsoft.com/office/drawing/2014/main" id="{63C1200E-D751-EAF3-C7A7-9124710E30FE}"/>
+                <a16:creationId xmlns:a16="http://schemas.microsoft.com/office/drawing/2014/main" id="{86F23194-67F4-4A79-7A73-C523FE8E1BE6}"/>
               </a:ext>
             </a:extLst>
           </p:cNvPr>
@@ -5284,7 +5278,7 @@
             <a:hlinkClick r:id="" action="ppaction://media"/>
             <a:extLst>
               <a:ext uri="{FF2B5EF4-FFF2-40B4-BE49-F238E27FC236}">
-                <a16:creationId xmlns:a16="http://schemas.microsoft.com/office/drawing/2014/main" id="{EDFF6563-F4DF-A6B5-9973-51F187657A52}"/>
+                <a16:creationId xmlns:a16="http://schemas.microsoft.com/office/drawing/2014/main" id="{137C9F4B-45DE-EAF4-B705-ACDCEE8B9D9A}"/>
               </a:ext>
             </a:extLst>
           </p:cNvPr>
@@ -5319,7 +5313,7 @@
     </p:spTree>
     <p:extLst>
       <p:ext uri="{BB962C8B-B14F-4D97-AF65-F5344CB8AC3E}">
-        <p14:creationId xmlns:p14="http://schemas.microsoft.com/office/powerpoint/2010/main" val="1522742980"/>
+        <p14:creationId xmlns:p14="http://schemas.microsoft.com/office/powerpoint/2010/main" val="2771394640"/>
       </p:ext>
     </p:extLst>
   </p:cSld>
@@ -5362,7 +5356,7 @@
                                   <p:childTnLst>
                                     <p:cmd type="call" cmd="playFrom(0.0)">
                                       <p:cBhvr>
-                                        <p:cTn id="6" dur="6451" fill="hold"/>
+                                        <p:cTn id="6" dur="6076" fill="hold"/>
                                         <p:tgtEl>
                                           <p:spTgt spid="6"/>
                                         </p:tgtEl>
@@ -5443,7 +5437,7 @@
           <p:cNvPr id="2" name="テキスト ボックス 1">
             <a:extLst>
               <a:ext uri="{FF2B5EF4-FFF2-40B4-BE49-F238E27FC236}">
-                <a16:creationId xmlns:a16="http://schemas.microsoft.com/office/drawing/2014/main" id="{B8753F57-E2CE-4C0D-1288-1006AE70DC75}"/>
+                <a16:creationId xmlns:a16="http://schemas.microsoft.com/office/drawing/2014/main" id="{66F9BDD0-EF58-40BB-25FD-7DF1E5405D6E}"/>
               </a:ext>
             </a:extLst>
           </p:cNvPr>
@@ -5489,7 +5483,7 @@
           <p:cNvPr id="3" name="テキスト ボックス 2">
             <a:extLst>
               <a:ext uri="{FF2B5EF4-FFF2-40B4-BE49-F238E27FC236}">
-                <a16:creationId xmlns:a16="http://schemas.microsoft.com/office/drawing/2014/main" id="{B4367DAF-B3BA-6E17-307C-6979DCC21F2F}"/>
+                <a16:creationId xmlns:a16="http://schemas.microsoft.com/office/drawing/2014/main" id="{263B950C-280A-B8F6-2617-E86569699387}"/>
               </a:ext>
             </a:extLst>
           </p:cNvPr>
@@ -5529,7 +5523,7 @@
           <p:cNvPr id="4" name="テキスト ボックス 3">
             <a:extLst>
               <a:ext uri="{FF2B5EF4-FFF2-40B4-BE49-F238E27FC236}">
-                <a16:creationId xmlns:a16="http://schemas.microsoft.com/office/drawing/2014/main" id="{FC72183D-8A20-8CBD-3BBE-DC2B1D60B252}"/>
+                <a16:creationId xmlns:a16="http://schemas.microsoft.com/office/drawing/2014/main" id="{BD57F889-0362-C332-DE64-AF1F955134DE}"/>
               </a:ext>
             </a:extLst>
           </p:cNvPr>
@@ -5594,7 +5588,7 @@
           <p:cNvPr id="5" name="テキスト ボックス 4">
             <a:extLst>
               <a:ext uri="{FF2B5EF4-FFF2-40B4-BE49-F238E27FC236}">
-                <a16:creationId xmlns:a16="http://schemas.microsoft.com/office/drawing/2014/main" id="{D282EC2C-5746-AE4C-FD0E-4240F7F2EDAB}"/>
+                <a16:creationId xmlns:a16="http://schemas.microsoft.com/office/drawing/2014/main" id="{EFAF6F68-6B19-C18F-39EF-3611826E593E}"/>
               </a:ext>
             </a:extLst>
           </p:cNvPr>
@@ -5641,7 +5635,7 @@
             <a:hlinkClick r:id="" action="ppaction://media"/>
             <a:extLst>
               <a:ext uri="{FF2B5EF4-FFF2-40B4-BE49-F238E27FC236}">
-                <a16:creationId xmlns:a16="http://schemas.microsoft.com/office/drawing/2014/main" id="{226570BF-DB58-156A-B6E3-86EE665250F2}"/>
+                <a16:creationId xmlns:a16="http://schemas.microsoft.com/office/drawing/2014/main" id="{A457CB8D-B11B-A1A8-C95A-BA44BEE450A7}"/>
               </a:ext>
             </a:extLst>
           </p:cNvPr>
@@ -5676,7 +5670,7 @@
     </p:spTree>
     <p:extLst>
       <p:ext uri="{BB962C8B-B14F-4D97-AF65-F5344CB8AC3E}">
-        <p14:creationId xmlns:p14="http://schemas.microsoft.com/office/powerpoint/2010/main" val="3156284184"/>
+        <p14:creationId xmlns:p14="http://schemas.microsoft.com/office/powerpoint/2010/main" val="3582489910"/>
       </p:ext>
     </p:extLst>
   </p:cSld>
